--- a/dist/초1/수학/수와연산/초1_수학_수와연산_07_100까지의수_학생용.pptx
+++ b/dist/초1/수학/수와연산/초1_수학_수와연산_07_100까지의수_학생용.pptx
@@ -120,13 +120,13 @@
   <p:extLst>
     <p:ext uri="{521415D9-36F7-43E2-AB2F-B90AF26B5E84}">
       <p14:sectionLst xmlns:p14="http://schemas.microsoft.com/office/powerpoint/2010/main">
-        <p14:section name="도입" id="{40165d93-743e-1552-d8db-647b59901939}">
+        <p14:section name="도입" id="{c45f5f6e-3818-77b4-755a-566305b3458e}">
           <p14:sldIdLst>
             <p14:sldId id="256"/>
             <p14:sldId id="257"/>
           </p14:sldIdLst>
         </p14:section>
-        <p14:section name="개념" id="{7cb8d610-cbf3-3b73-8fb2-d7a452046998}">
+        <p14:section name="개념" id="{3cf21346-a163-edd1-94a7-70ec71fadcf7}">
           <p14:sldIdLst>
             <p14:sldId id="258"/>
             <p14:sldId id="259"/>
@@ -135,25 +135,25 @@
             <p14:sldId id="262"/>
           </p14:sldIdLst>
         </p14:section>
-        <p14:section name="연습" id="{7a7d1569-0f12-1231-d485-d42a30c2c5b2}">
+        <p14:section name="연습" id="{de7e54f4-f117-9e81-6654-75f69d6d71d2}">
           <p14:sldIdLst>
             <p14:sldId id="263"/>
             <p14:sldId id="264"/>
             <p14:sldId id="265"/>
           </p14:sldIdLst>
         </p14:section>
-        <p14:section name="확인" id="{fa72f9d2-09d8-1127-7879-7b21eefd523f}">
+        <p14:section name="확인" id="{5063101c-dc5b-f80e-17dd-a1483cac61da}">
           <p14:sldIdLst>
             <p14:sldId id="266"/>
             <p14:sldId id="267"/>
           </p14:sldIdLst>
         </p14:section>
-        <p14:section name="정리" id="{218421bf-400b-5a0d-b55e-7d441de1c653}">
+        <p14:section name="정리" id="{62906008-76c5-7dc9-2b2c-0feafee5293d}">
           <p14:sldIdLst>
             <p14:sldId id="268"/>
           </p14:sldIdLst>
         </p14:section>
-        <p14:section name="보충" id="{672f8f4e-5a3d-f449-5c91-60485a2e8496}">
+        <p14:section name="보충" id="{54766455-af1a-6932-021f-419c3ead0b7a}">
           <p14:sldIdLst>
             <p14:sldId id="269"/>
           </p14:sldIdLst>
@@ -2785,7 +2785,7 @@
           <a:bodyPr wrap="square" lIns="0" tIns="0" rIns="0" bIns="0" rtlCol="0" anchor="ctr"/>
           <a:lstStyle/>
           <a:p>
-            <a:pPr algn="l" indent="0" marL="0">
+            <a:pPr eaLnBrk="0" algn="l" indent="0" marL="0">
               <a:buNone/>
             </a:pPr>
             <a:r>
@@ -2826,7 +2826,7 @@
           <a:bodyPr wrap="square" lIns="0" tIns="0" rIns="0" bIns="0" rtlCol="0" anchor="t"/>
           <a:lstStyle/>
           <a:p>
-            <a:pPr indent="0" marL="0">
+            <a:pPr eaLnBrk="0" indent="0" marL="0">
               <a:buNone/>
             </a:pPr>
             <a:r>
@@ -4363,7 +4363,7 @@
           <a:bodyPr wrap="square" lIns="0" tIns="0" rIns="0" bIns="0" rtlCol="0" anchor="ctr"/>
           <a:lstStyle/>
           <a:p>
-            <a:pPr indent="0" marL="0">
+            <a:pPr eaLnBrk="0" indent="0" marL="0">
               <a:spcAft>
                 <a:spcPts val="600"/>
               </a:spcAft>
@@ -4383,7 +4383,7 @@
             <a:endParaRPr lang="ko-KR" sz="3200" dirty="0"/>
           </a:p>
           <a:p>
-            <a:pPr indent="0" marL="0">
+            <a:pPr eaLnBrk="0" indent="0" marL="0">
               <a:spcAft>
                 <a:spcPts val="600"/>
               </a:spcAft>
@@ -4403,7 +4403,7 @@
             <a:endParaRPr lang="ko-KR" sz="3200" dirty="0"/>
           </a:p>
           <a:p>
-            <a:pPr indent="0" marL="0">
+            <a:pPr eaLnBrk="0" indent="0" marL="0">
               <a:spcAft>
                 <a:spcPts val="600"/>
               </a:spcAft>
@@ -4472,7 +4472,7 @@
           <a:bodyPr wrap="square" lIns="0" tIns="0" rIns="0" bIns="0" rtlCol="0" anchor="ctr"/>
           <a:lstStyle/>
           <a:p>
-            <a:pPr algn="l" indent="0" marL="0">
+            <a:pPr eaLnBrk="0" algn="l" indent="0" marL="0">
               <a:buNone/>
             </a:pPr>
             <a:r>
@@ -4538,7 +4538,7 @@
           <a:bodyPr wrap="square" lIns="0" tIns="0" rIns="0" bIns="0" rtlCol="0" anchor="ctr"/>
           <a:lstStyle/>
           <a:p>
-            <a:pPr indent="0" marL="0">
+            <a:pPr eaLnBrk="0" indent="0" marL="0">
               <a:spcAft>
                 <a:spcPts val="600"/>
               </a:spcAft>
@@ -4607,7 +4607,7 @@
           <a:bodyPr wrap="square" lIns="0" tIns="0" rIns="0" bIns="0" rtlCol="0" anchor="ctr"/>
           <a:lstStyle/>
           <a:p>
-            <a:pPr indent="0" marL="0">
+            <a:pPr eaLnBrk="0" indent="0" marL="0">
               <a:spcAft>
                 <a:spcPts val="600"/>
               </a:spcAft>
@@ -4657,7 +4657,7 @@
           <a:bodyPr wrap="square" lIns="177800" tIns="0" rIns="177800" bIns="0" rtlCol="0" anchor="ctr"/>
           <a:lstStyle/>
           <a:p>
-            <a:pPr algn="l" indent="0" marL="0">
+            <a:pPr eaLnBrk="0" algn="l" indent="0" marL="0">
               <a:buNone/>
             </a:pPr>
             <a:r>
@@ -4696,7 +4696,7 @@
           <a:bodyPr wrap="square" lIns="0" tIns="0" rIns="0" bIns="0" rtlCol="0" anchor="t"/>
           <a:lstStyle/>
           <a:p>
-            <a:pPr algn="l" indent="0" marL="0">
+            <a:pPr eaLnBrk="0" algn="l" indent="0" marL="0">
               <a:buNone/>
             </a:pPr>
             <a:r>
@@ -4713,7 +4713,7 @@
             <a:endParaRPr lang="ko-KR" sz="3200" dirty="0"/>
           </a:p>
           <a:p>
-            <a:pPr algn="l" indent="0" marL="0">
+            <a:pPr eaLnBrk="0" algn="l" indent="0" marL="0">
               <a:buNone/>
             </a:pPr>
             <a:r>
@@ -4760,7 +4760,7 @@
           <a:bodyPr wrap="square" lIns="177800" tIns="0" rIns="177800" bIns="0" rtlCol="0" anchor="ctr"/>
           <a:lstStyle/>
           <a:p>
-            <a:pPr algn="l" indent="0" marL="0">
+            <a:pPr eaLnBrk="0" algn="l" indent="0" marL="0">
               <a:buNone/>
             </a:pPr>
             <a:r>
@@ -4799,7 +4799,7 @@
           <a:bodyPr wrap="square" lIns="0" tIns="0" rIns="0" bIns="0" rtlCol="0" anchor="t"/>
           <a:lstStyle/>
           <a:p>
-            <a:pPr algn="l" indent="0" marL="0">
+            <a:pPr eaLnBrk="0" algn="l" indent="0" marL="0">
               <a:buNone/>
             </a:pPr>
             <a:r>
@@ -4816,7 +4816,7 @@
             <a:endParaRPr lang="ko-KR" sz="3200" dirty="0"/>
           </a:p>
           <a:p>
-            <a:pPr algn="l" indent="0" marL="0">
+            <a:pPr eaLnBrk="0" algn="l" indent="0" marL="0">
               <a:buNone/>
             </a:pPr>
             <a:r>
@@ -4873,7 +4873,7 @@
             </a:lvl1pPr>
           </a:lstStyle>
           <a:p>
-            <a:pPr algn="r"/>
+            <a:pPr eaLnBrk="0" algn="r"/>
             <a:fld id="{F7021451-1387-4CA6-816F-3879F97B5CBC}" type="slidenum">
               <a:rPr b="0" lang="en-US"/>
               <a:t>10</a:t>
@@ -4930,7 +4930,7 @@
           <a:bodyPr wrap="square" lIns="0" tIns="0" rIns="0" bIns="0" rtlCol="0" anchor="ctr"/>
           <a:lstStyle/>
           <a:p>
-            <a:pPr algn="l" indent="0" marL="0">
+            <a:pPr eaLnBrk="0" algn="l" indent="0" marL="0">
               <a:buNone/>
             </a:pPr>
             <a:r>
@@ -4969,7 +4969,7 @@
           <a:bodyPr wrap="square" lIns="0" tIns="0" rIns="0" bIns="0" rtlCol="0" anchor="ctr"/>
           <a:lstStyle/>
           <a:p>
-            <a:pPr algn="l" indent="0" marL="0">
+            <a:pPr eaLnBrk="0" algn="l" indent="0" marL="0">
               <a:buNone/>
             </a:pPr>
             <a:r>
@@ -5016,7 +5016,7 @@
           <a:bodyPr wrap="square" lIns="0" tIns="0" rIns="0" bIns="0" rtlCol="0" anchor="ctr"/>
           <a:lstStyle/>
           <a:p>
-            <a:pPr algn="ctr" indent="0" marL="0">
+            <a:pPr eaLnBrk="0" algn="ctr" indent="0" marL="0">
               <a:buNone/>
             </a:pPr>
             <a:r>
@@ -5055,7 +5055,7 @@
           <a:bodyPr wrap="square" lIns="0" tIns="0" rIns="0" bIns="0" rtlCol="0" anchor="ctr"/>
           <a:lstStyle/>
           <a:p>
-            <a:pPr algn="l" indent="0" marL="0">
+            <a:pPr eaLnBrk="0" algn="l" indent="0" marL="0">
               <a:buNone/>
             </a:pPr>
             <a:r>
@@ -5102,7 +5102,7 @@
           <a:bodyPr wrap="square" lIns="0" tIns="0" rIns="0" bIns="0" rtlCol="0" anchor="ctr"/>
           <a:lstStyle/>
           <a:p>
-            <a:pPr algn="ctr" indent="0" marL="0">
+            <a:pPr eaLnBrk="0" algn="ctr" indent="0" marL="0">
               <a:buNone/>
             </a:pPr>
             <a:r>
@@ -5141,7 +5141,7 @@
           <a:bodyPr wrap="square" lIns="0" tIns="0" rIns="0" bIns="0" rtlCol="0" anchor="ctr"/>
           <a:lstStyle/>
           <a:p>
-            <a:pPr algn="l" indent="0" marL="0">
+            <a:pPr eaLnBrk="0" algn="l" indent="0" marL="0">
               <a:buNone/>
             </a:pPr>
             <a:r>
@@ -5188,7 +5188,7 @@
           <a:bodyPr wrap="square" lIns="0" tIns="0" rIns="0" bIns="0" rtlCol="0" anchor="ctr"/>
           <a:lstStyle/>
           <a:p>
-            <a:pPr algn="ctr" indent="0" marL="0">
+            <a:pPr eaLnBrk="0" algn="ctr" indent="0" marL="0">
               <a:buNone/>
             </a:pPr>
             <a:r>
@@ -5227,7 +5227,7 @@
           <a:bodyPr wrap="square" lIns="0" tIns="0" rIns="0" bIns="0" rtlCol="0" anchor="ctr"/>
           <a:lstStyle/>
           <a:p>
-            <a:pPr algn="l" indent="0" marL="0">
+            <a:pPr eaLnBrk="0" algn="l" indent="0" marL="0">
               <a:buNone/>
             </a:pPr>
             <a:r>
@@ -5274,7 +5274,7 @@
           <a:bodyPr wrap="square" lIns="0" tIns="0" rIns="0" bIns="0" rtlCol="0" anchor="ctr"/>
           <a:lstStyle/>
           <a:p>
-            <a:pPr algn="ctr" indent="0" marL="0">
+            <a:pPr eaLnBrk="0" algn="ctr" indent="0" marL="0">
               <a:buNone/>
             </a:pPr>
             <a:r>
@@ -5313,7 +5313,7 @@
           <a:bodyPr wrap="square" lIns="0" tIns="0" rIns="0" bIns="0" rtlCol="0" anchor="ctr"/>
           <a:lstStyle/>
           <a:p>
-            <a:pPr algn="l" indent="0" marL="0">
+            <a:pPr eaLnBrk="0" algn="l" indent="0" marL="0">
               <a:buNone/>
             </a:pPr>
             <a:r>
@@ -5370,7 +5370,7 @@
             </a:lvl1pPr>
           </a:lstStyle>
           <a:p>
-            <a:pPr algn="r"/>
+            <a:pPr eaLnBrk="0" algn="r"/>
             <a:fld id="{F7021451-1387-4CA6-816F-3879F97B5CBC}" type="slidenum">
               <a:rPr b="0" lang="en-US"/>
               <a:t>11</a:t>
@@ -5427,7 +5427,7 @@
           <a:bodyPr wrap="square" lIns="0" tIns="0" rIns="0" bIns="0" rtlCol="0" anchor="ctr"/>
           <a:lstStyle/>
           <a:p>
-            <a:pPr algn="l" indent="0" marL="0">
+            <a:pPr eaLnBrk="0" algn="l" indent="0" marL="0">
               <a:buNone/>
             </a:pPr>
             <a:r>
@@ -5493,7 +5493,7 @@
           <a:bodyPr wrap="square" lIns="0" tIns="0" rIns="0" bIns="0" rtlCol="0" anchor="ctr"/>
           <a:lstStyle/>
           <a:p>
-            <a:pPr indent="0" marL="0">
+            <a:pPr eaLnBrk="0" indent="0" marL="0">
               <a:spcAft>
                 <a:spcPts val="600"/>
               </a:spcAft>
@@ -5543,7 +5543,7 @@
           <a:bodyPr wrap="square" lIns="0" tIns="0" rIns="0" bIns="0" rtlCol="0" anchor="ctr"/>
           <a:lstStyle/>
           <a:p>
-            <a:pPr algn="ctr" indent="0" marL="0">
+            <a:pPr eaLnBrk="0" algn="ctr" indent="0" marL="0">
               <a:buNone/>
             </a:pPr>
             <a:r>
@@ -6540,7 +6540,7 @@
           <a:bodyPr wrap="square" lIns="0" tIns="0" rIns="0" bIns="0" rtlCol="0" anchor="ctr"/>
           <a:lstStyle/>
           <a:p>
-            <a:pPr algn="ctr" indent="0" marL="0">
+            <a:pPr eaLnBrk="0" algn="ctr" indent="0" marL="0">
               <a:buNone/>
             </a:pPr>
             <a:r>
@@ -7579,7 +7579,7 @@
             </a:lvl1pPr>
           </a:lstStyle>
           <a:p>
-            <a:pPr algn="r"/>
+            <a:pPr eaLnBrk="0" algn="r"/>
             <a:fld id="{F7021451-1387-4CA6-816F-3879F97B5CBC}" type="slidenum">
               <a:rPr b="0" lang="en-US"/>
               <a:t>12</a:t>
@@ -7636,7 +7636,7 @@
           <a:bodyPr wrap="square" lIns="0" tIns="0" rIns="0" bIns="0" rtlCol="0" anchor="ctr"/>
           <a:lstStyle/>
           <a:p>
-            <a:pPr algn="l" indent="0" marL="0">
+            <a:pPr eaLnBrk="0" algn="l" indent="0" marL="0">
               <a:buNone/>
             </a:pPr>
             <a:r>
@@ -7702,7 +7702,7 @@
           <a:bodyPr wrap="square" lIns="0" tIns="0" rIns="0" bIns="0" rtlCol="0" anchor="ctr"/>
           <a:lstStyle/>
           <a:p>
-            <a:pPr indent="0" marL="0">
+            <a:pPr eaLnBrk="0" indent="0" marL="0">
               <a:spcAft>
                 <a:spcPts val="600"/>
               </a:spcAft>
@@ -7752,7 +7752,7 @@
           <a:bodyPr wrap="square" lIns="177800" tIns="0" rIns="177800" bIns="0" rtlCol="0" anchor="ctr"/>
           <a:lstStyle/>
           <a:p>
-            <a:pPr algn="l" indent="0" marL="0">
+            <a:pPr eaLnBrk="0" algn="l" indent="0" marL="0">
               <a:buNone/>
             </a:pPr>
             <a:r>
@@ -7799,7 +7799,7 @@
           <a:bodyPr wrap="square" lIns="177800" tIns="0" rIns="177800" bIns="0" rtlCol="0" anchor="ctr"/>
           <a:lstStyle/>
           <a:p>
-            <a:pPr algn="l" indent="0" marL="0">
+            <a:pPr eaLnBrk="0" algn="l" indent="0" marL="0">
               <a:buNone/>
             </a:pPr>
             <a:r>
@@ -7838,7 +7838,7 @@
           <a:bodyPr wrap="square" lIns="0" tIns="0" rIns="0" bIns="0" rtlCol="0" anchor="t"/>
           <a:lstStyle/>
           <a:p>
-            <a:pPr algn="l" indent="0" marL="0">
+            <a:pPr eaLnBrk="0" algn="l" indent="0" marL="0">
               <a:buNone/>
             </a:pPr>
             <a:r>
@@ -7877,7 +7877,7 @@
           <a:bodyPr wrap="square" lIns="0" tIns="0" rIns="0" bIns="0" rtlCol="0" anchor="ctr"/>
           <a:lstStyle/>
           <a:p>
-            <a:pPr algn="l" indent="0" marL="0">
+            <a:pPr eaLnBrk="0" algn="l" indent="0" marL="0">
               <a:buNone/>
             </a:pPr>
             <a:r>
@@ -7894,7 +7894,7 @@
             <a:endParaRPr lang="ko-KR" sz="2600" dirty="0"/>
           </a:p>
           <a:p>
-            <a:pPr algn="l" indent="0" marL="0">
+            <a:pPr eaLnBrk="0" algn="l" indent="0" marL="0">
               <a:buNone/>
             </a:pPr>
             <a:r>
@@ -7933,7 +7933,7 @@
           <a:bodyPr wrap="square" lIns="0" tIns="0" rIns="0" bIns="0" rtlCol="0" anchor="ctr"/>
           <a:lstStyle/>
           <a:p>
-            <a:pPr algn="l" indent="0" marL="0">
+            <a:pPr eaLnBrk="0" algn="l" indent="0" marL="0">
               <a:buNone/>
             </a:pPr>
             <a:r>
@@ -7950,7 +7950,7 @@
             <a:endParaRPr lang="ko-KR" sz="2600" dirty="0"/>
           </a:p>
           <a:p>
-            <a:pPr algn="l" indent="0" marL="0">
+            <a:pPr eaLnBrk="0" algn="l" indent="0" marL="0">
               <a:buNone/>
             </a:pPr>
             <a:r>
@@ -7989,7 +7989,7 @@
           <a:bodyPr wrap="square" lIns="0" tIns="0" rIns="0" bIns="0" rtlCol="0" anchor="ctr"/>
           <a:lstStyle/>
           <a:p>
-            <a:pPr algn="l" indent="0" marL="0">
+            <a:pPr eaLnBrk="0" algn="l" indent="0" marL="0">
               <a:buNone/>
             </a:pPr>
             <a:r>
@@ -8006,7 +8006,7 @@
             <a:endParaRPr lang="ko-KR" sz="2600" dirty="0"/>
           </a:p>
           <a:p>
-            <a:pPr algn="l" indent="0" marL="0">
+            <a:pPr eaLnBrk="0" algn="l" indent="0" marL="0">
               <a:buNone/>
             </a:pPr>
             <a:r>
@@ -8045,7 +8045,7 @@
           <a:bodyPr wrap="square" lIns="0" tIns="0" rIns="0" bIns="0" rtlCol="0" anchor="ctr"/>
           <a:lstStyle/>
           <a:p>
-            <a:pPr algn="l" indent="0" marL="0">
+            <a:pPr eaLnBrk="0" algn="l" indent="0" marL="0">
               <a:buNone/>
             </a:pPr>
             <a:r>
@@ -8102,7 +8102,7 @@
             </a:lvl1pPr>
           </a:lstStyle>
           <a:p>
-            <a:pPr algn="r"/>
+            <a:pPr eaLnBrk="0" algn="r"/>
             <a:fld id="{F7021451-1387-4CA6-816F-3879F97B5CBC}" type="slidenum">
               <a:rPr b="0" lang="en-US"/>
               <a:t>13</a:t>
@@ -8159,7 +8159,7 @@
           <a:bodyPr wrap="square" lIns="0" tIns="0" rIns="0" bIns="0" rtlCol="0" anchor="ctr"/>
           <a:lstStyle/>
           <a:p>
-            <a:pPr algn="l" indent="0" marL="0">
+            <a:pPr eaLnBrk="0" algn="l" indent="0" marL="0">
               <a:buNone/>
             </a:pPr>
             <a:r>
@@ -8198,7 +8198,7 @@
           <a:bodyPr wrap="square" lIns="0" tIns="0" rIns="0" bIns="0" rtlCol="0" anchor="ctr"/>
           <a:lstStyle/>
           <a:p>
-            <a:pPr algn="l" indent="0" marL="0">
+            <a:pPr eaLnBrk="0" algn="l" indent="0" marL="0">
               <a:buNone/>
             </a:pPr>
             <a:r>
@@ -8264,7 +8264,7 @@
           <a:bodyPr wrap="square" lIns="0" tIns="0" rIns="0" bIns="0" rtlCol="0" anchor="ctr"/>
           <a:lstStyle/>
           <a:p>
-            <a:pPr indent="0" marL="0">
+            <a:pPr eaLnBrk="0" indent="0" marL="0">
               <a:spcAft>
                 <a:spcPts val="600"/>
               </a:spcAft>
@@ -8893,7 +8893,7 @@
           <a:bodyPr wrap="square" lIns="0" tIns="0" rIns="0" bIns="0" rtlCol="0" anchor="ctr"/>
           <a:lstStyle/>
           <a:p>
-            <a:pPr algn="ctr" indent="0" marL="0">
+            <a:pPr eaLnBrk="0" algn="ctr" indent="0" marL="0">
               <a:buNone/>
             </a:pPr>
             <a:r>
@@ -9086,7 +9086,7 @@
           <a:bodyPr wrap="square" lIns="0" tIns="0" rIns="0" bIns="0" rtlCol="0" anchor="ctr"/>
           <a:lstStyle/>
           <a:p>
-            <a:pPr algn="ctr" indent="0" marL="0">
+            <a:pPr eaLnBrk="0" algn="ctr" indent="0" marL="0">
               <a:buNone/>
             </a:pPr>
             <a:r>
@@ -9143,7 +9143,7 @@
             </a:lvl1pPr>
           </a:lstStyle>
           <a:p>
-            <a:pPr algn="r"/>
+            <a:pPr eaLnBrk="0" algn="r"/>
             <a:fld id="{F7021451-1387-4CA6-816F-3879F97B5CBC}" type="slidenum">
               <a:rPr b="0" lang="en-US"/>
               <a:t>14</a:t>
@@ -9200,7 +9200,7 @@
           <a:bodyPr wrap="square" lIns="0" tIns="0" rIns="0" bIns="0" rtlCol="0" anchor="ctr"/>
           <a:lstStyle/>
           <a:p>
-            <a:pPr algn="l" indent="0" marL="0">
+            <a:pPr eaLnBrk="0" algn="l" indent="0" marL="0">
               <a:buNone/>
             </a:pPr>
             <a:r>
@@ -9247,7 +9247,7 @@
           <a:bodyPr wrap="square" lIns="0" tIns="0" rIns="0" bIns="0" rtlCol="0" anchor="ctr"/>
           <a:lstStyle/>
           <a:p>
-            <a:pPr algn="ctr" indent="0" marL="0">
+            <a:pPr eaLnBrk="0" algn="ctr" indent="0" marL="0">
               <a:buNone/>
             </a:pPr>
             <a:r>
@@ -9286,7 +9286,7 @@
           <a:bodyPr wrap="square" lIns="0" tIns="0" rIns="0" bIns="0" rtlCol="0" anchor="ctr"/>
           <a:lstStyle/>
           <a:p>
-            <a:pPr algn="l" indent="0" marL="0">
+            <a:pPr eaLnBrk="0" algn="l" indent="0" marL="0">
               <a:buNone/>
             </a:pPr>
             <a:r>
@@ -9333,7 +9333,7 @@
           <a:bodyPr wrap="square" lIns="0" tIns="0" rIns="0" bIns="0" rtlCol="0" anchor="ctr"/>
           <a:lstStyle/>
           <a:p>
-            <a:pPr algn="ctr" indent="0" marL="0">
+            <a:pPr eaLnBrk="0" algn="ctr" indent="0" marL="0">
               <a:buNone/>
             </a:pPr>
             <a:r>
@@ -9372,7 +9372,7 @@
           <a:bodyPr wrap="square" lIns="0" tIns="0" rIns="0" bIns="0" rtlCol="0" anchor="ctr"/>
           <a:lstStyle/>
           <a:p>
-            <a:pPr algn="l" indent="0" marL="0">
+            <a:pPr eaLnBrk="0" algn="l" indent="0" marL="0">
               <a:buNone/>
             </a:pPr>
             <a:r>
@@ -9419,7 +9419,7 @@
           <a:bodyPr wrap="square" lIns="0" tIns="0" rIns="0" bIns="0" rtlCol="0" anchor="ctr"/>
           <a:lstStyle/>
           <a:p>
-            <a:pPr algn="ctr" indent="0" marL="0">
+            <a:pPr eaLnBrk="0" algn="ctr" indent="0" marL="0">
               <a:buNone/>
             </a:pPr>
             <a:r>
@@ -9458,7 +9458,7 @@
           <a:bodyPr wrap="square" lIns="0" tIns="0" rIns="0" bIns="0" rtlCol="0" anchor="ctr"/>
           <a:lstStyle/>
           <a:p>
-            <a:pPr algn="l" indent="0" marL="0">
+            <a:pPr eaLnBrk="0" algn="l" indent="0" marL="0">
               <a:buNone/>
             </a:pPr>
             <a:r>
@@ -9515,7 +9515,7 @@
             </a:lvl1pPr>
           </a:lstStyle>
           <a:p>
-            <a:pPr algn="r"/>
+            <a:pPr eaLnBrk="0" algn="r"/>
             <a:fld id="{F7021451-1387-4CA6-816F-3879F97B5CBC}" type="slidenum">
               <a:rPr b="0" lang="en-US"/>
               <a:t>2</a:t>
@@ -9572,7 +9572,7 @@
           <a:bodyPr wrap="square" lIns="0" tIns="0" rIns="0" bIns="0" rtlCol="0" anchor="ctr"/>
           <a:lstStyle/>
           <a:p>
-            <a:pPr algn="l" indent="0" marL="0">
+            <a:pPr eaLnBrk="0" algn="l" indent="0" marL="0">
               <a:buNone/>
             </a:pPr>
             <a:r>
@@ -9611,7 +9611,7 @@
           <a:bodyPr wrap="square" lIns="0" tIns="0" rIns="0" bIns="0" rtlCol="0" anchor="ctr"/>
           <a:lstStyle/>
           <a:p>
-            <a:pPr algn="l" indent="0" marL="0">
+            <a:pPr eaLnBrk="0" algn="l" indent="0" marL="0">
               <a:buNone/>
             </a:pPr>
             <a:r>
@@ -9677,7 +9677,7 @@
           <a:bodyPr wrap="square" lIns="0" tIns="0" rIns="0" bIns="0" rtlCol="0" anchor="ctr"/>
           <a:lstStyle/>
           <a:p>
-            <a:pPr indent="0" marL="0">
+            <a:pPr eaLnBrk="0" indent="0" marL="0">
               <a:spcAft>
                 <a:spcPts val="600"/>
               </a:spcAft>
@@ -9732,7 +9732,7 @@
                     <a:bodyPr/>
                     <a:lstStyle/>
                     <a:p>
-                      <a:pPr algn="ctr" indent="0" marL="0">
+                      <a:pPr eaLnBrk="0" algn="ctr" indent="0" marL="0">
                         <a:buNone/>
                       </a:pPr>
                       <a:r>
@@ -9800,7 +9800,7 @@
                     <a:bodyPr/>
                     <a:lstStyle/>
                     <a:p>
-                      <a:pPr algn="ctr" indent="0" marL="0">
+                      <a:pPr eaLnBrk="0" algn="ctr" indent="0" marL="0">
                         <a:buNone/>
                       </a:pPr>
                       <a:r>
@@ -9868,7 +9868,7 @@
                     <a:bodyPr/>
                     <a:lstStyle/>
                     <a:p>
-                      <a:pPr algn="ctr" indent="0" marL="0">
+                      <a:pPr eaLnBrk="0" algn="ctr" indent="0" marL="0">
                         <a:buNone/>
                       </a:pPr>
                       <a:r>
@@ -9936,7 +9936,7 @@
                     <a:bodyPr/>
                     <a:lstStyle/>
                     <a:p>
-                      <a:pPr algn="ctr" indent="0" marL="0">
+                      <a:pPr eaLnBrk="0" algn="ctr" indent="0" marL="0">
                         <a:buNone/>
                       </a:pPr>
                       <a:r>
@@ -10006,7 +10006,7 @@
                     <a:bodyPr/>
                     <a:lstStyle/>
                     <a:p>
-                      <a:pPr algn="ctr" indent="0" marL="0">
+                      <a:pPr eaLnBrk="0" algn="ctr" indent="0" marL="0">
                         <a:buNone/>
                       </a:pPr>
                       <a:r>
@@ -10074,7 +10074,7 @@
                     <a:bodyPr/>
                     <a:lstStyle/>
                     <a:p>
-                      <a:pPr algn="ctr" indent="0" marL="0">
+                      <a:pPr eaLnBrk="0" algn="ctr" indent="0" marL="0">
                         <a:buNone/>
                       </a:pPr>
                       <a:r>
@@ -10142,7 +10142,7 @@
                     <a:bodyPr/>
                     <a:lstStyle/>
                     <a:p>
-                      <a:pPr algn="ctr" indent="0" marL="0">
+                      <a:pPr eaLnBrk="0" algn="ctr" indent="0" marL="0">
                         <a:buNone/>
                       </a:pPr>
                       <a:r>
@@ -10210,7 +10210,7 @@
                     <a:bodyPr/>
                     <a:lstStyle/>
                     <a:p>
-                      <a:pPr algn="ctr" indent="0" marL="0">
+                      <a:pPr eaLnBrk="0" algn="ctr" indent="0" marL="0">
                         <a:buNone/>
                       </a:pPr>
                       <a:r>
@@ -10280,7 +10280,7 @@
                     <a:bodyPr/>
                     <a:lstStyle/>
                     <a:p>
-                      <a:pPr algn="ctr" indent="0" marL="0">
+                      <a:pPr eaLnBrk="0" algn="ctr" indent="0" marL="0">
                         <a:buNone/>
                       </a:pPr>
                       <a:r>
@@ -10348,7 +10348,7 @@
                     <a:bodyPr/>
                     <a:lstStyle/>
                     <a:p>
-                      <a:pPr algn="ctr" indent="0" marL="0">
+                      <a:pPr eaLnBrk="0" algn="ctr" indent="0" marL="0">
                         <a:buNone/>
                       </a:pPr>
                       <a:r>
@@ -10416,7 +10416,7 @@
                     <a:bodyPr/>
                     <a:lstStyle/>
                     <a:p>
-                      <a:pPr algn="ctr" indent="0" marL="0">
+                      <a:pPr eaLnBrk="0" algn="ctr" indent="0" marL="0">
                         <a:buNone/>
                       </a:pPr>
                       <a:r>
@@ -10484,7 +10484,7 @@
                     <a:bodyPr/>
                     <a:lstStyle/>
                     <a:p>
-                      <a:pPr algn="ctr" indent="0" marL="0">
+                      <a:pPr eaLnBrk="0" algn="ctr" indent="0" marL="0">
                         <a:buNone/>
                       </a:pPr>
                       <a:r>
@@ -10554,7 +10554,7 @@
                     <a:bodyPr/>
                     <a:lstStyle/>
                     <a:p>
-                      <a:pPr algn="ctr" indent="0" marL="0">
+                      <a:pPr eaLnBrk="0" algn="ctr" indent="0" marL="0">
                         <a:buNone/>
                       </a:pPr>
                       <a:r>
@@ -10622,7 +10622,7 @@
                     <a:bodyPr/>
                     <a:lstStyle/>
                     <a:p>
-                      <a:pPr algn="ctr" indent="0" marL="0">
+                      <a:pPr eaLnBrk="0" algn="ctr" indent="0" marL="0">
                         <a:buNone/>
                       </a:pPr>
                       <a:r>
@@ -10690,7 +10690,7 @@
                     <a:bodyPr/>
                     <a:lstStyle/>
                     <a:p>
-                      <a:pPr algn="ctr" indent="0" marL="0">
+                      <a:pPr eaLnBrk="0" algn="ctr" indent="0" marL="0">
                         <a:buNone/>
                       </a:pPr>
                       <a:r>
@@ -10758,7 +10758,7 @@
                     <a:bodyPr/>
                     <a:lstStyle/>
                     <a:p>
-                      <a:pPr algn="ctr" indent="0" marL="0">
+                      <a:pPr eaLnBrk="0" algn="ctr" indent="0" marL="0">
                         <a:buNone/>
                       </a:pPr>
                       <a:r>
@@ -10828,7 +10828,7 @@
                     <a:bodyPr/>
                     <a:lstStyle/>
                     <a:p>
-                      <a:pPr algn="ctr" indent="0" marL="0">
+                      <a:pPr eaLnBrk="0" algn="ctr" indent="0" marL="0">
                         <a:buNone/>
                       </a:pPr>
                       <a:r>
@@ -10896,7 +10896,7 @@
                     <a:bodyPr/>
                     <a:lstStyle/>
                     <a:p>
-                      <a:pPr algn="ctr" indent="0" marL="0">
+                      <a:pPr eaLnBrk="0" algn="ctr" indent="0" marL="0">
                         <a:buNone/>
                       </a:pPr>
                       <a:r>
@@ -10964,7 +10964,7 @@
                     <a:bodyPr/>
                     <a:lstStyle/>
                     <a:p>
-                      <a:pPr algn="ctr" indent="0" marL="0">
+                      <a:pPr eaLnBrk="0" algn="ctr" indent="0" marL="0">
                         <a:buNone/>
                       </a:pPr>
                       <a:r>
@@ -11032,7 +11032,7 @@
                     <a:bodyPr/>
                     <a:lstStyle/>
                     <a:p>
-                      <a:pPr algn="ctr" indent="0" marL="0">
+                      <a:pPr eaLnBrk="0" algn="ctr" indent="0" marL="0">
                         <a:buNone/>
                       </a:pPr>
                       <a:r>
@@ -11139,7 +11139,7 @@
             </a:lvl1pPr>
           </a:lstStyle>
           <a:p>
-            <a:pPr algn="r"/>
+            <a:pPr eaLnBrk="0" algn="r"/>
             <a:fld id="{F7021451-1387-4CA6-816F-3879F97B5CBC}" type="slidenum">
               <a:rPr b="0" lang="en-US"/>
               <a:t>3</a:t>
@@ -11196,7 +11196,7 @@
           <a:bodyPr wrap="square" lIns="0" tIns="0" rIns="0" bIns="0" rtlCol="0" anchor="ctr"/>
           <a:lstStyle/>
           <a:p>
-            <a:pPr algn="l" indent="0" marL="0">
+            <a:pPr eaLnBrk="0" algn="l" indent="0" marL="0">
               <a:buNone/>
             </a:pPr>
             <a:r>
@@ -11262,7 +11262,7 @@
           <a:bodyPr wrap="square" lIns="0" tIns="0" rIns="0" bIns="0" rtlCol="0" anchor="ctr"/>
           <a:lstStyle/>
           <a:p>
-            <a:pPr indent="0" marL="0">
+            <a:pPr eaLnBrk="0" indent="0" marL="0">
               <a:spcAft>
                 <a:spcPts val="600"/>
               </a:spcAft>
@@ -11282,7 +11282,7 @@
             <a:endParaRPr lang="ko-KR" sz="3200" dirty="0"/>
           </a:p>
           <a:p>
-            <a:pPr indent="0" marL="0">
+            <a:pPr eaLnBrk="0" indent="0" marL="0">
               <a:spcAft>
                 <a:spcPts val="600"/>
               </a:spcAft>
@@ -13113,7 +13113,7 @@
                     <a:bodyPr/>
                     <a:lstStyle/>
                     <a:p>
-                      <a:pPr algn="ctr" indent="0" marL="0">
+                      <a:pPr eaLnBrk="0" algn="ctr" indent="0" marL="0">
                         <a:buNone/>
                       </a:pPr>
                       <a:r>
@@ -13181,7 +13181,7 @@
                     <a:bodyPr/>
                     <a:lstStyle/>
                     <a:p>
-                      <a:pPr algn="ctr" indent="0" marL="0">
+                      <a:pPr eaLnBrk="0" algn="ctr" indent="0" marL="0">
                         <a:buNone/>
                       </a:pPr>
                       <a:r>
@@ -13251,7 +13251,7 @@
                     <a:bodyPr/>
                     <a:lstStyle/>
                     <a:p>
-                      <a:pPr algn="ctr" indent="0" marL="0">
+                      <a:pPr eaLnBrk="0" algn="ctr" indent="0" marL="0">
                         <a:buNone/>
                       </a:pPr>
                       <a:r>
@@ -13319,7 +13319,7 @@
                     <a:bodyPr/>
                     <a:lstStyle/>
                     <a:p>
-                      <a:pPr algn="ctr" indent="0" marL="0">
+                      <a:pPr eaLnBrk="0" algn="ctr" indent="0" marL="0">
                         <a:buNone/>
                       </a:pPr>
                       <a:r>
@@ -13426,7 +13426,7 @@
             </a:lvl1pPr>
           </a:lstStyle>
           <a:p>
-            <a:pPr algn="r"/>
+            <a:pPr eaLnBrk="0" algn="r"/>
             <a:fld id="{F7021451-1387-4CA6-816F-3879F97B5CBC}" type="slidenum">
               <a:rPr b="0" lang="en-US"/>
               <a:t>4</a:t>
@@ -13483,7 +13483,7 @@
           <a:bodyPr wrap="square" lIns="0" tIns="0" rIns="0" bIns="0" rtlCol="0" anchor="ctr"/>
           <a:lstStyle/>
           <a:p>
-            <a:pPr algn="l" indent="0" marL="0">
+            <a:pPr eaLnBrk="0" algn="l" indent="0" marL="0">
               <a:buNone/>
             </a:pPr>
             <a:r>
@@ -13549,7 +13549,7 @@
           <a:bodyPr wrap="square" lIns="0" tIns="0" rIns="0" bIns="0" rtlCol="0" anchor="ctr"/>
           <a:lstStyle/>
           <a:p>
-            <a:pPr indent="0" marL="0">
+            <a:pPr eaLnBrk="0" indent="0" marL="0">
               <a:spcAft>
                 <a:spcPts val="600"/>
               </a:spcAft>
@@ -13569,7 +13569,7 @@
             <a:endParaRPr lang="ko-KR" sz="3200" dirty="0"/>
           </a:p>
           <a:p>
-            <a:pPr indent="0" marL="0">
+            <a:pPr eaLnBrk="0" indent="0" marL="0">
               <a:spcAft>
                 <a:spcPts val="600"/>
               </a:spcAft>
@@ -13638,7 +13638,7 @@
           <a:bodyPr wrap="square" lIns="0" tIns="0" rIns="0" bIns="0" rtlCol="0" anchor="ctr"/>
           <a:lstStyle/>
           <a:p>
-            <a:pPr indent="0" marL="0">
+            <a:pPr eaLnBrk="0" indent="0" marL="0">
               <a:spcAft>
                 <a:spcPts val="600"/>
               </a:spcAft>
@@ -13707,7 +13707,7 @@
           <a:bodyPr wrap="square" lIns="0" tIns="0" rIns="0" bIns="0" rtlCol="0" anchor="ctr"/>
           <a:lstStyle/>
           <a:p>
-            <a:pPr indent="0" marL="0">
+            <a:pPr eaLnBrk="0" indent="0" marL="0">
               <a:spcAft>
                 <a:spcPts val="600"/>
               </a:spcAft>
@@ -16116,7 +16116,7 @@
             </a:lvl1pPr>
           </a:lstStyle>
           <a:p>
-            <a:pPr algn="r"/>
+            <a:pPr eaLnBrk="0" algn="r"/>
             <a:fld id="{F7021451-1387-4CA6-816F-3879F97B5CBC}" type="slidenum">
               <a:rPr b="0" lang="en-US"/>
               <a:t>5</a:t>
@@ -16173,7 +16173,7 @@
           <a:bodyPr wrap="square" lIns="0" tIns="0" rIns="0" bIns="0" rtlCol="0" anchor="ctr"/>
           <a:lstStyle/>
           <a:p>
-            <a:pPr algn="l" indent="0" marL="0">
+            <a:pPr eaLnBrk="0" algn="l" indent="0" marL="0">
               <a:buNone/>
             </a:pPr>
             <a:r>
@@ -16239,7 +16239,7 @@
           <a:bodyPr wrap="square" lIns="0" tIns="0" rIns="0" bIns="0" rtlCol="0" anchor="ctr"/>
           <a:lstStyle/>
           <a:p>
-            <a:pPr indent="0" marL="0">
+            <a:pPr eaLnBrk="0" indent="0" marL="0">
               <a:spcAft>
                 <a:spcPts val="600"/>
               </a:spcAft>
@@ -17802,7 +17802,7 @@
           <a:bodyPr wrap="square" lIns="0" tIns="0" rIns="0" bIns="0" rtlCol="0" anchor="ctr"/>
           <a:lstStyle/>
           <a:p>
-            <a:pPr algn="ctr" indent="0" marL="0">
+            <a:pPr eaLnBrk="0" algn="ctr" indent="0" marL="0">
               <a:buNone/>
             </a:pPr>
             <a:r>
@@ -19230,7 +19230,7 @@
           <a:bodyPr wrap="square" lIns="0" tIns="0" rIns="0" bIns="0" rtlCol="0" anchor="ctr"/>
           <a:lstStyle/>
           <a:p>
-            <a:pPr algn="ctr" indent="0" marL="0">
+            <a:pPr eaLnBrk="0" algn="ctr" indent="0" marL="0">
               <a:buNone/>
             </a:pPr>
             <a:r>
@@ -19287,7 +19287,7 @@
             </a:lvl1pPr>
           </a:lstStyle>
           <a:p>
-            <a:pPr algn="r"/>
+            <a:pPr eaLnBrk="0" algn="r"/>
             <a:fld id="{F7021451-1387-4CA6-816F-3879F97B5CBC}" type="slidenum">
               <a:rPr b="0" lang="en-US"/>
               <a:t>6</a:t>
@@ -19344,7 +19344,7 @@
           <a:bodyPr wrap="square" lIns="0" tIns="0" rIns="0" bIns="0" rtlCol="0" anchor="ctr"/>
           <a:lstStyle/>
           <a:p>
-            <a:pPr algn="l" indent="0" marL="0">
+            <a:pPr eaLnBrk="0" algn="l" indent="0" marL="0">
               <a:buNone/>
             </a:pPr>
             <a:r>
@@ -19410,7 +19410,7 @@
           <a:bodyPr wrap="square" lIns="0" tIns="0" rIns="0" bIns="0" rtlCol="0" anchor="ctr"/>
           <a:lstStyle/>
           <a:p>
-            <a:pPr indent="0" marL="0">
+            <a:pPr eaLnBrk="0" indent="0" marL="0">
               <a:spcAft>
                 <a:spcPts val="600"/>
               </a:spcAft>
@@ -21180,7 +21180,7 @@
           <a:bodyPr wrap="square" lIns="0" tIns="0" rIns="0" bIns="0" rtlCol="0" anchor="ctr"/>
           <a:lstStyle/>
           <a:p>
-            <a:pPr algn="ctr" indent="0" marL="0">
+            <a:pPr eaLnBrk="0" algn="ctr" indent="0" marL="0">
               <a:buNone/>
             </a:pPr>
             <a:r>
@@ -23022,7 +23022,7 @@
           <a:bodyPr wrap="square" lIns="0" tIns="0" rIns="0" bIns="0" rtlCol="0" anchor="ctr"/>
           <a:lstStyle/>
           <a:p>
-            <a:pPr algn="ctr" indent="0" marL="0">
+            <a:pPr eaLnBrk="0" algn="ctr" indent="0" marL="0">
               <a:buNone/>
             </a:pPr>
             <a:r>
@@ -23079,7 +23079,7 @@
             </a:lvl1pPr>
           </a:lstStyle>
           <a:p>
-            <a:pPr algn="r"/>
+            <a:pPr eaLnBrk="0" algn="r"/>
             <a:fld id="{F7021451-1387-4CA6-816F-3879F97B5CBC}" type="slidenum">
               <a:rPr b="0" lang="en-US"/>
               <a:t>7</a:t>
@@ -23136,7 +23136,7 @@
           <a:bodyPr wrap="square" lIns="0" tIns="0" rIns="0" bIns="0" rtlCol="0" anchor="ctr"/>
           <a:lstStyle/>
           <a:p>
-            <a:pPr algn="l" indent="0" marL="0">
+            <a:pPr eaLnBrk="0" algn="l" indent="0" marL="0">
               <a:buNone/>
             </a:pPr>
             <a:r>
@@ -23202,7 +23202,7 @@
           <a:bodyPr wrap="square" lIns="0" tIns="0" rIns="0" bIns="0" rtlCol="0" anchor="ctr"/>
           <a:lstStyle/>
           <a:p>
-            <a:pPr indent="0" marL="0">
+            <a:pPr eaLnBrk="0" indent="0" marL="0">
               <a:spcAft>
                 <a:spcPts val="600"/>
               </a:spcAft>
@@ -23252,7 +23252,7 @@
           <a:bodyPr wrap="square" lIns="0" tIns="0" rIns="0" bIns="0" rtlCol="0" anchor="ctr"/>
           <a:lstStyle/>
           <a:p>
-            <a:pPr algn="ctr" indent="0" marL="0">
+            <a:pPr eaLnBrk="0" algn="ctr" indent="0" marL="0">
               <a:buNone/>
             </a:pPr>
             <a:r>
@@ -23291,7 +23291,7 @@
           <a:bodyPr wrap="square" lIns="0" tIns="0" rIns="0" bIns="0" rtlCol="0" anchor="ctr"/>
           <a:lstStyle/>
           <a:p>
-            <a:pPr algn="l" indent="0" marL="0">
+            <a:pPr eaLnBrk="0" algn="l" indent="0" marL="0">
               <a:buNone/>
             </a:pPr>
             <a:r>
@@ -23338,7 +23338,7 @@
           <a:bodyPr wrap="square" lIns="0" tIns="0" rIns="0" bIns="0" rtlCol="0" anchor="ctr"/>
           <a:lstStyle/>
           <a:p>
-            <a:pPr algn="ctr" indent="0" marL="0">
+            <a:pPr eaLnBrk="0" algn="ctr" indent="0" marL="0">
               <a:buNone/>
             </a:pPr>
             <a:r>
@@ -23377,7 +23377,7 @@
           <a:bodyPr wrap="square" lIns="0" tIns="0" rIns="0" bIns="0" rtlCol="0" anchor="ctr"/>
           <a:lstStyle/>
           <a:p>
-            <a:pPr algn="l" indent="0" marL="0">
+            <a:pPr eaLnBrk="0" algn="l" indent="0" marL="0">
               <a:buNone/>
             </a:pPr>
             <a:r>
@@ -23424,7 +23424,7 @@
           <a:bodyPr wrap="square" lIns="0" tIns="0" rIns="0" bIns="0" rtlCol="0" anchor="ctr"/>
           <a:lstStyle/>
           <a:p>
-            <a:pPr algn="ctr" indent="0" marL="0">
+            <a:pPr eaLnBrk="0" algn="ctr" indent="0" marL="0">
               <a:buNone/>
             </a:pPr>
             <a:r>
@@ -23463,7 +23463,7 @@
           <a:bodyPr wrap="square" lIns="0" tIns="0" rIns="0" bIns="0" rtlCol="0" anchor="ctr"/>
           <a:lstStyle/>
           <a:p>
-            <a:pPr algn="l" indent="0" marL="0">
+            <a:pPr eaLnBrk="0" algn="l" indent="0" marL="0">
               <a:buNone/>
             </a:pPr>
             <a:r>
@@ -23510,7 +23510,7 @@
           <a:bodyPr wrap="square" lIns="0" tIns="0" rIns="0" bIns="0" rtlCol="0" anchor="ctr"/>
           <a:lstStyle/>
           <a:p>
-            <a:pPr algn="ctr" indent="0" marL="0">
+            <a:pPr eaLnBrk="0" algn="ctr" indent="0" marL="0">
               <a:buNone/>
             </a:pPr>
             <a:r>
@@ -23549,7 +23549,7 @@
           <a:bodyPr wrap="square" lIns="0" tIns="0" rIns="0" bIns="0" rtlCol="0" anchor="ctr"/>
           <a:lstStyle/>
           <a:p>
-            <a:pPr algn="l" indent="0" marL="0">
+            <a:pPr eaLnBrk="0" algn="l" indent="0" marL="0">
               <a:buNone/>
             </a:pPr>
             <a:r>
@@ -23606,7 +23606,7 @@
             </a:lvl1pPr>
           </a:lstStyle>
           <a:p>
-            <a:pPr algn="r"/>
+            <a:pPr eaLnBrk="0" algn="r"/>
             <a:fld id="{F7021451-1387-4CA6-816F-3879F97B5CBC}" type="slidenum">
               <a:rPr b="0" lang="en-US"/>
               <a:t>8</a:t>
@@ -23663,7 +23663,7 @@
           <a:bodyPr wrap="square" lIns="0" tIns="0" rIns="0" bIns="0" rtlCol="0" anchor="ctr"/>
           <a:lstStyle/>
           <a:p>
-            <a:pPr algn="l" indent="0" marL="0">
+            <a:pPr eaLnBrk="0" algn="l" indent="0" marL="0">
               <a:buNone/>
             </a:pPr>
             <a:r>
@@ -23702,7 +23702,7 @@
           <a:bodyPr wrap="square" lIns="0" tIns="0" rIns="0" bIns="0" rtlCol="0" anchor="ctr"/>
           <a:lstStyle/>
           <a:p>
-            <a:pPr algn="l" indent="0" marL="0">
+            <a:pPr eaLnBrk="0" algn="l" indent="0" marL="0">
               <a:buNone/>
             </a:pPr>
             <a:r>
@@ -23768,7 +23768,7 @@
           <a:bodyPr wrap="square" lIns="0" tIns="0" rIns="0" bIns="0" rtlCol="0" anchor="ctr"/>
           <a:lstStyle/>
           <a:p>
-            <a:pPr indent="0" marL="0">
+            <a:pPr eaLnBrk="0" indent="0" marL="0">
               <a:spcAft>
                 <a:spcPts val="600"/>
               </a:spcAft>
@@ -23837,7 +23837,7 @@
           <a:bodyPr wrap="square" lIns="0" tIns="0" rIns="0" bIns="0" rtlCol="0" anchor="t"/>
           <a:lstStyle/>
           <a:p>
-            <a:pPr indent="0" marL="0">
+            <a:pPr eaLnBrk="0" indent="0" marL="0">
               <a:spcAft>
                 <a:spcPts val="600"/>
               </a:spcAft>
@@ -23891,7 +23891,7 @@
                     <a:bodyPr/>
                     <a:lstStyle/>
                     <a:p>
-                      <a:pPr algn="ctr" indent="0" marL="0">
+                      <a:pPr eaLnBrk="0" algn="ctr" indent="0" marL="0">
                         <a:buNone/>
                       </a:pPr>
                       <a:endParaRPr lang="en-US" sz="3000" dirty="0">
@@ -23948,7 +23948,7 @@
                     <a:bodyPr/>
                     <a:lstStyle/>
                     <a:p>
-                      <a:pPr algn="ctr" indent="0" marL="0">
+                      <a:pPr eaLnBrk="0" algn="ctr" indent="0" marL="0">
                         <a:buNone/>
                       </a:pPr>
                       <a:r>
@@ -24016,7 +24016,7 @@
                     <a:bodyPr/>
                     <a:lstStyle/>
                     <a:p>
-                      <a:pPr algn="ctr" indent="0" marL="0">
+                      <a:pPr eaLnBrk="0" algn="ctr" indent="0" marL="0">
                         <a:buNone/>
                       </a:pPr>
                       <a:r>
@@ -24086,7 +24086,7 @@
                     <a:bodyPr/>
                     <a:lstStyle/>
                     <a:p>
-                      <a:pPr algn="ctr" indent="0" marL="0">
+                      <a:pPr eaLnBrk="0" algn="ctr" indent="0" marL="0">
                         <a:buNone/>
                       </a:pPr>
                       <a:r>
@@ -24154,7 +24154,7 @@
                     <a:bodyPr/>
                     <a:lstStyle/>
                     <a:p>
-                      <a:pPr algn="ctr" indent="0" marL="0">
+                      <a:pPr eaLnBrk="0" algn="ctr" indent="0" marL="0">
                         <a:buNone/>
                       </a:pPr>
                       <a:r>
@@ -24222,7 +24222,7 @@
                     <a:bodyPr/>
                     <a:lstStyle/>
                     <a:p>
-                      <a:pPr algn="ctr" indent="0" marL="0">
+                      <a:pPr eaLnBrk="0" algn="ctr" indent="0" marL="0">
                         <a:buNone/>
                       </a:pPr>
                       <a:r>
@@ -24292,7 +24292,7 @@
                     <a:bodyPr/>
                     <a:lstStyle/>
                     <a:p>
-                      <a:pPr algn="ctr" indent="0" marL="0">
+                      <a:pPr eaLnBrk="0" algn="ctr" indent="0" marL="0">
                         <a:buNone/>
                       </a:pPr>
                       <a:r>
@@ -24360,7 +24360,7 @@
                     <a:bodyPr/>
                     <a:lstStyle/>
                     <a:p>
-                      <a:pPr algn="ctr" indent="0" marL="0">
+                      <a:pPr eaLnBrk="0" algn="ctr" indent="0" marL="0">
                         <a:buNone/>
                       </a:pPr>
                       <a:r>
@@ -24428,7 +24428,7 @@
                     <a:bodyPr/>
                     <a:lstStyle/>
                     <a:p>
-                      <a:pPr algn="ctr" indent="0" marL="0">
+                      <a:pPr eaLnBrk="0" algn="ctr" indent="0" marL="0">
                         <a:buNone/>
                       </a:pPr>
                       <a:r>
@@ -24525,7 +24525,7 @@
           <a:bodyPr wrap="square" lIns="0" tIns="0" rIns="0" bIns="0" rtlCol="0" anchor="ctr"/>
           <a:lstStyle/>
           <a:p>
-            <a:pPr algn="ctr" indent="0" marL="0">
+            <a:pPr eaLnBrk="0" algn="ctr" indent="0" marL="0">
               <a:buNone/>
             </a:pPr>
             <a:r>
@@ -24564,7 +24564,7 @@
           <a:bodyPr wrap="square" lIns="0" tIns="0" rIns="0" bIns="0" rtlCol="0" anchor="ctr"/>
           <a:lstStyle/>
           <a:p>
-            <a:pPr algn="l" indent="0" marL="0">
+            <a:pPr eaLnBrk="0" algn="l" indent="0" marL="0">
               <a:buNone/>
             </a:pPr>
             <a:r>
@@ -24611,7 +24611,7 @@
           <a:bodyPr wrap="square" lIns="0" tIns="0" rIns="0" bIns="0" rtlCol="0" anchor="ctr"/>
           <a:lstStyle/>
           <a:p>
-            <a:pPr algn="ctr" indent="0" marL="0">
+            <a:pPr eaLnBrk="0" algn="ctr" indent="0" marL="0">
               <a:buNone/>
             </a:pPr>
             <a:r>
@@ -24650,7 +24650,7 @@
           <a:bodyPr wrap="square" lIns="0" tIns="0" rIns="0" bIns="0" rtlCol="0" anchor="ctr"/>
           <a:lstStyle/>
           <a:p>
-            <a:pPr algn="l" indent="0" marL="0">
+            <a:pPr eaLnBrk="0" algn="l" indent="0" marL="0">
               <a:buNone/>
             </a:pPr>
             <a:r>
@@ -24697,7 +24697,7 @@
           <a:bodyPr wrap="square" lIns="0" tIns="0" rIns="0" bIns="0" rtlCol="0" anchor="ctr"/>
           <a:lstStyle/>
           <a:p>
-            <a:pPr algn="ctr" indent="0" marL="0">
+            <a:pPr eaLnBrk="0" algn="ctr" indent="0" marL="0">
               <a:buNone/>
             </a:pPr>
             <a:r>
@@ -24736,7 +24736,7 @@
           <a:bodyPr wrap="square" lIns="0" tIns="0" rIns="0" bIns="0" rtlCol="0" anchor="ctr"/>
           <a:lstStyle/>
           <a:p>
-            <a:pPr algn="l" indent="0" marL="0">
+            <a:pPr eaLnBrk="0" algn="l" indent="0" marL="0">
               <a:buNone/>
             </a:pPr>
             <a:r>
@@ -24793,7 +24793,7 @@
             </a:lvl1pPr>
           </a:lstStyle>
           <a:p>
-            <a:pPr algn="r"/>
+            <a:pPr eaLnBrk="0" algn="r"/>
             <a:fld id="{F7021451-1387-4CA6-816F-3879F97B5CBC}" type="slidenum">
               <a:rPr b="0" lang="en-US"/>
               <a:t>9</a:t>

--- a/dist/초1/수학/수와연산/초1_수학_수와연산_07_100까지의수_학생용.pptx
+++ b/dist/초1/수학/수와연산/초1_수학_수와연산_07_100까지의수_학생용.pptx
@@ -120,13 +120,13 @@
   <p:extLst>
     <p:ext uri="{521415D9-36F7-43E2-AB2F-B90AF26B5E84}">
       <p14:sectionLst xmlns:p14="http://schemas.microsoft.com/office/powerpoint/2010/main">
-        <p14:section name="도입" id="{c45f5f6e-3818-77b4-755a-566305b3458e}">
+        <p14:section name="도입" id="{eed7fc10-8f26-1f57-79f3-950d4c91ba61}">
           <p14:sldIdLst>
             <p14:sldId id="256"/>
             <p14:sldId id="257"/>
           </p14:sldIdLst>
         </p14:section>
-        <p14:section name="개념" id="{3cf21346-a163-edd1-94a7-70ec71fadcf7}">
+        <p14:section name="개념" id="{8f2f50ee-a537-e1a1-14b8-1f224eae9fd0}">
           <p14:sldIdLst>
             <p14:sldId id="258"/>
             <p14:sldId id="259"/>
@@ -135,25 +135,25 @@
             <p14:sldId id="262"/>
           </p14:sldIdLst>
         </p14:section>
-        <p14:section name="연습" id="{de7e54f4-f117-9e81-6654-75f69d6d71d2}">
+        <p14:section name="연습" id="{9af283d6-04a4-5555-35c3-a583c61a33f2}">
           <p14:sldIdLst>
             <p14:sldId id="263"/>
             <p14:sldId id="264"/>
             <p14:sldId id="265"/>
           </p14:sldIdLst>
         </p14:section>
-        <p14:section name="확인" id="{5063101c-dc5b-f80e-17dd-a1483cac61da}">
+        <p14:section name="확인" id="{0692230c-8311-7545-6b18-7b5648ee7088}">
           <p14:sldIdLst>
             <p14:sldId id="266"/>
             <p14:sldId id="267"/>
           </p14:sldIdLst>
         </p14:section>
-        <p14:section name="정리" id="{62906008-76c5-7dc9-2b2c-0feafee5293d}">
+        <p14:section name="정리" id="{c42cf601-cc5d-7ace-7d57-fffe47765e4f}">
           <p14:sldIdLst>
             <p14:sldId id="268"/>
           </p14:sldIdLst>
         </p14:section>
-        <p14:section name="보충" id="{54766455-af1a-6932-021f-419c3ead0b7a}">
+        <p14:section name="보충" id="{a2ebe1b7-b60e-cd88-fdb7-c0dbd7715e2b}">
           <p14:sldIdLst>
             <p14:sldId id="269"/>
           </p14:sldIdLst>

--- a/dist/초1/수학/수와연산/초1_수학_수와연산_07_100까지의수_학생용.pptx
+++ b/dist/초1/수학/수와연산/초1_수학_수와연산_07_100까지의수_학생용.pptx
@@ -120,13 +120,13 @@
   <p:extLst>
     <p:ext uri="{521415D9-36F7-43E2-AB2F-B90AF26B5E84}">
       <p14:sectionLst xmlns:p14="http://schemas.microsoft.com/office/powerpoint/2010/main">
-        <p14:section name="도입" id="{eed7fc10-8f26-1f57-79f3-950d4c91ba61}">
+        <p14:section name="도입" id="{884abae7-da12-7904-46f9-0fc0720ee390}">
           <p14:sldIdLst>
             <p14:sldId id="256"/>
             <p14:sldId id="257"/>
           </p14:sldIdLst>
         </p14:section>
-        <p14:section name="개념" id="{8f2f50ee-a537-e1a1-14b8-1f224eae9fd0}">
+        <p14:section name="개념" id="{8b7e6123-0cff-fb79-3a66-2ffcb3c1075b}">
           <p14:sldIdLst>
             <p14:sldId id="258"/>
             <p14:sldId id="259"/>
@@ -135,25 +135,25 @@
             <p14:sldId id="262"/>
           </p14:sldIdLst>
         </p14:section>
-        <p14:section name="연습" id="{9af283d6-04a4-5555-35c3-a583c61a33f2}">
+        <p14:section name="연습" id="{02a7383c-7f51-3bfb-067e-a51f874c427d}">
           <p14:sldIdLst>
             <p14:sldId id="263"/>
             <p14:sldId id="264"/>
             <p14:sldId id="265"/>
           </p14:sldIdLst>
         </p14:section>
-        <p14:section name="확인" id="{0692230c-8311-7545-6b18-7b5648ee7088}">
+        <p14:section name="확인" id="{dfab3e9e-6446-82a6-15eb-d24772f48e4e}">
           <p14:sldIdLst>
             <p14:sldId id="266"/>
             <p14:sldId id="267"/>
           </p14:sldIdLst>
         </p14:section>
-        <p14:section name="정리" id="{c42cf601-cc5d-7ace-7d57-fffe47765e4f}">
+        <p14:section name="정리" id="{e89c5a05-615e-de22-2d91-9d9c16728f15}">
           <p14:sldIdLst>
             <p14:sldId id="268"/>
           </p14:sldIdLst>
         </p14:section>
-        <p14:section name="보충" id="{a2ebe1b7-b60e-cd88-fdb7-c0dbd7715e2b}">
+        <p14:section name="보충" id="{9b2d48a2-9435-b701-bf4a-0c247a426307}">
           <p14:sldIdLst>
             <p14:sldId id="269"/>
           </p14:sldIdLst>
@@ -9713,7 +9713,7 @@
           </p:nvPr>
         </p:nvGraphicFramePr>
         <p:xfrm>
-          <a:off x="1522476" y="2042160"/>
+          <a:off x="1522476" y="2089785"/>
           <a:ext cx="9144000" cy="914400"/>
         </p:xfrm>
         <a:graphic>
@@ -9726,7 +9726,7 @@
                 <a:gridCol w="2103120"/>
                 <a:gridCol w="2103120"/>
               </a:tblGrid>
-              <a:tr h="609600">
+              <a:tr h="590550">
                 <a:tc>
                   <a:txBody>
                     <a:bodyPr/>
@@ -10000,7 +10000,7 @@
                   </a:tcPr>
                 </a:tc>
               </a:tr>
-              <a:tr h="609600">
+              <a:tr h="590550">
                 <a:tc>
                   <a:txBody>
                     <a:bodyPr/>
@@ -10274,7 +10274,7 @@
                   </a:tcPr>
                 </a:tc>
               </a:tr>
-              <a:tr h="609600">
+              <a:tr h="590550">
                 <a:tc>
                   <a:txBody>
                     <a:bodyPr/>
@@ -10548,7 +10548,7 @@
                   </a:tcPr>
                 </a:tc>
               </a:tr>
-              <a:tr h="609600">
+              <a:tr h="590550">
                 <a:tc>
                   <a:txBody>
                     <a:bodyPr/>
@@ -10822,7 +10822,7 @@
                   </a:tcPr>
                 </a:tc>
               </a:tr>
-              <a:tr h="609600">
+              <a:tr h="590550">
                 <a:tc>
                   <a:txBody>
                     <a:bodyPr/>
@@ -13096,7 +13096,7 @@
           </p:nvPr>
         </p:nvGraphicFramePr>
         <p:xfrm>
-          <a:off x="6478524" y="2355342"/>
+          <a:off x="6478524" y="2375662"/>
           <a:ext cx="4937760" cy="914400"/>
         </p:xfrm>
         <a:graphic>
@@ -13107,7 +13107,7 @@
                 <a:gridCol w="2962656"/>
                 <a:gridCol w="1975104"/>
               </a:tblGrid>
-              <a:tr h="650240">
+              <a:tr h="629920">
                 <a:tc>
                   <a:txBody>
                     <a:bodyPr/>
@@ -13245,7 +13245,7 @@
                   </a:tcPr>
                 </a:tc>
               </a:tr>
-              <a:tr h="650240">
+              <a:tr h="629920">
                 <a:tc>
                   <a:txBody>
                     <a:bodyPr/>
@@ -23873,7 +23873,7 @@
           </p:nvPr>
         </p:nvGraphicFramePr>
         <p:xfrm>
-          <a:off x="6551676" y="2903220"/>
+          <a:off x="6551676" y="2931795"/>
           <a:ext cx="4814316" cy="914400"/>
         </p:xfrm>
         <a:graphic>
@@ -23885,7 +23885,7 @@
                 <a:gridCol w="1604772"/>
                 <a:gridCol w="1604772"/>
               </a:tblGrid>
-              <a:tr h="609600">
+              <a:tr h="590550">
                 <a:tc>
                   <a:txBody>
                     <a:bodyPr/>
@@ -24080,7 +24080,7 @@
                   </a:tcPr>
                 </a:tc>
               </a:tr>
-              <a:tr h="609600">
+              <a:tr h="590550">
                 <a:tc>
                   <a:txBody>
                     <a:bodyPr/>
@@ -24286,7 +24286,7 @@
                   </a:tcPr>
                 </a:tc>
               </a:tr>
-              <a:tr h="609600">
+              <a:tr h="590550">
                 <a:tc>
                   <a:txBody>
                     <a:bodyPr/>
